--- a/endtemplates/endt1.pptx
+++ b/endtemplates/endt1.pptx
@@ -259,7 +259,7 @@
           <a:p>
             <a:fld id="{87EEB319-7FE2-430F-B600-99146EDF8234}" type="datetimeFigureOut">
               <a:rPr lang="en-US" smtClean="0"/>
-              <a:t>6/8/2026</a:t>
+              <a:t>8/2/2026</a:t>
             </a:fld>
             <a:endParaRPr lang="en-US"/>
           </a:p>
@@ -457,7 +457,7 @@
           <a:p>
             <a:fld id="{87EEB319-7FE2-430F-B600-99146EDF8234}" type="datetimeFigureOut">
               <a:rPr lang="en-US" smtClean="0"/>
-              <a:t>6/8/2026</a:t>
+              <a:t>8/2/2026</a:t>
             </a:fld>
             <a:endParaRPr lang="en-US"/>
           </a:p>
@@ -665,7 +665,7 @@
           <a:p>
             <a:fld id="{87EEB319-7FE2-430F-B600-99146EDF8234}" type="datetimeFigureOut">
               <a:rPr lang="en-US" smtClean="0"/>
-              <a:t>6/8/2026</a:t>
+              <a:t>8/2/2026</a:t>
             </a:fld>
             <a:endParaRPr lang="en-US"/>
           </a:p>
@@ -863,7 +863,7 @@
           <a:p>
             <a:fld id="{87EEB319-7FE2-430F-B600-99146EDF8234}" type="datetimeFigureOut">
               <a:rPr lang="en-US" smtClean="0"/>
-              <a:t>6/8/2026</a:t>
+              <a:t>8/2/2026</a:t>
             </a:fld>
             <a:endParaRPr lang="en-US"/>
           </a:p>
@@ -1138,7 +1138,7 @@
           <a:p>
             <a:fld id="{87EEB319-7FE2-430F-B600-99146EDF8234}" type="datetimeFigureOut">
               <a:rPr lang="en-US" smtClean="0"/>
-              <a:t>6/8/2026</a:t>
+              <a:t>8/2/2026</a:t>
             </a:fld>
             <a:endParaRPr lang="en-US"/>
           </a:p>
@@ -1403,7 +1403,7 @@
           <a:p>
             <a:fld id="{87EEB319-7FE2-430F-B600-99146EDF8234}" type="datetimeFigureOut">
               <a:rPr lang="en-US" smtClean="0"/>
-              <a:t>6/8/2026</a:t>
+              <a:t>8/2/2026</a:t>
             </a:fld>
             <a:endParaRPr lang="en-US"/>
           </a:p>
@@ -1815,7 +1815,7 @@
           <a:p>
             <a:fld id="{87EEB319-7FE2-430F-B600-99146EDF8234}" type="datetimeFigureOut">
               <a:rPr lang="en-US" smtClean="0"/>
-              <a:t>6/8/2026</a:t>
+              <a:t>8/2/2026</a:t>
             </a:fld>
             <a:endParaRPr lang="en-US"/>
           </a:p>
@@ -1956,7 +1956,7 @@
           <a:p>
             <a:fld id="{87EEB319-7FE2-430F-B600-99146EDF8234}" type="datetimeFigureOut">
               <a:rPr lang="en-US" smtClean="0"/>
-              <a:t>6/8/2026</a:t>
+              <a:t>8/2/2026</a:t>
             </a:fld>
             <a:endParaRPr lang="en-US"/>
           </a:p>
@@ -2069,7 +2069,7 @@
           <a:p>
             <a:fld id="{87EEB319-7FE2-430F-B600-99146EDF8234}" type="datetimeFigureOut">
               <a:rPr lang="en-US" smtClean="0"/>
-              <a:t>6/8/2026</a:t>
+              <a:t>8/2/2026</a:t>
             </a:fld>
             <a:endParaRPr lang="en-US"/>
           </a:p>
@@ -2380,7 +2380,7 @@
           <a:p>
             <a:fld id="{87EEB319-7FE2-430F-B600-99146EDF8234}" type="datetimeFigureOut">
               <a:rPr lang="en-US" smtClean="0"/>
-              <a:t>6/8/2026</a:t>
+              <a:t>8/2/2026</a:t>
             </a:fld>
             <a:endParaRPr lang="en-US"/>
           </a:p>
@@ -2668,7 +2668,7 @@
           <a:p>
             <a:fld id="{87EEB319-7FE2-430F-B600-99146EDF8234}" type="datetimeFigureOut">
               <a:rPr lang="en-US" smtClean="0"/>
-              <a:t>6/8/2026</a:t>
+              <a:t>8/2/2026</a:t>
             </a:fld>
             <a:endParaRPr lang="en-US"/>
           </a:p>
@@ -2909,7 +2909,7 @@
           <a:p>
             <a:fld id="{87EEB319-7FE2-430F-B600-99146EDF8234}" type="datetimeFigureOut">
               <a:rPr lang="en-US" smtClean="0"/>
-              <a:t>6/8/2026</a:t>
+              <a:t>8/2/2026</a:t>
             </a:fld>
             <a:endParaRPr lang="en-US"/>
           </a:p>
@@ -3328,7 +3328,7 @@
       </p:grpSpPr>
       <p:sp>
         <p:nvSpPr>
-          <p:cNvPr id="3" name="conclusion-line">
+          <p:cNvPr id="3" name="ending">
             <a:extLst>
               <a:ext uri="{FF2B5EF4-FFF2-40B4-BE49-F238E27FC236}">
                 <a16:creationId xmlns:a16="http://schemas.microsoft.com/office/drawing/2014/main" id="{3F2BFDD8-8459-4FE6-A381-38F0E1D8B287}"/>
